--- a/downloads/product-launch.pptx
+++ b/downloads/product-launch.pptx
@@ -8,6 +8,8 @@
     <p:sldId id="256" r:id="rId2"/>
     <p:sldId id="257" r:id="rId3"/>
     <p:sldId id="258" r:id="rId4"/>
+    <p:sldId id="261" r:id="rId12"/>
+    <p:sldId id="262" r:id="rId13"/>
     <p:sldId id="259" r:id="rId5"/>
     <p:sldId id="260" r:id="rId6"/>
   </p:sldIdLst>
@@ -1595,7 +1597,7 @@
           <a:bodyPr wrap="square" rtlCol="0" anchor="ctr"/>
           <a:lstStyle/>
           <a:p>
-            <a:pPr algn="ctr" indent="0" marL="0">
+            <a:pPr algn="ctr" indent="0" marL="0" rtl="1">
               <a:buNone/>
             </a:pPr>
             <a:r>
@@ -1603,8 +1605,11 @@
                 <a:solidFill>
                   <a:srgbClr val="2563EB"/>
                 </a:solidFill>
-              </a:rPr>
-              <a:t>+3 שעות</a:t>
+                <a:latin typeface="Calibri" pitchFamily="34" charset="0"/>
+                <a:ea typeface="Calibri" pitchFamily="34" charset="-122"/>
+                <a:cs typeface="Calibri" pitchFamily="34" charset="-120"/>
+              </a:rPr>
+              <a:t>3 שעות</a:t>
             </a:r>
             <a:endParaRPr lang="en-US" sz="3200" dirty="0"/>
           </a:p>
@@ -1643,7 +1648,7 @@
                 <a:ea typeface="Calibri" pitchFamily="34" charset="-122"/>
                 <a:cs typeface="Calibri" pitchFamily="34" charset="-120"/>
               </a:rPr>
-              <a:t>נחסכות בממוצע ליום עבודה</a:t>
+              <a:t>נחסכות בממוצע בכל יום עבודה</a:t>
             </a:r>
             <a:endParaRPr lang="en-US" sz="1300" dirty="0"/>
           </a:p>
@@ -2369,13 +2374,13 @@
       </p:sp>
       <p:sp>
         <p:nvSpPr>
-          <p:cNvPr id="3" name="Shape 1"/>
-          <p:cNvSpPr/>
-          <p:nvPr/>
-        </p:nvSpPr>
-        <p:spPr>
-          <a:xfrm>
-            <a:off x="973836" y="1737360"/>
+          <p:cNvPr id="13" name="Shape 11"/>
+          <p:cNvSpPr/>
+          <p:nvPr/>
+        </p:nvSpPr>
+        <p:spPr>
+          <a:xfrm>
+            <a:off x="8014716" y="1737360"/>
             <a:ext cx="3200400" cy="4023360"/>
           </a:xfrm>
           <a:prstGeom prst="roundRect">
@@ -2391,13 +2396,13 @@
       </p:sp>
       <p:sp>
         <p:nvSpPr>
-          <p:cNvPr id="4" name="Text 2"/>
-          <p:cNvSpPr/>
-          <p:nvPr/>
-        </p:nvSpPr>
-        <p:spPr>
-          <a:xfrm>
-            <a:off x="973836" y="2011680"/>
+          <p:cNvPr id="14" name="Text 12"/>
+          <p:cNvSpPr/>
+          <p:nvPr/>
+        </p:nvSpPr>
+        <p:spPr>
+          <a:xfrm>
+            <a:off x="8014716" y="2011680"/>
             <a:ext cx="3200400" cy="365760"/>
           </a:xfrm>
           <a:prstGeom prst="rect">
@@ -2430,13 +2435,13 @@
       </p:sp>
       <p:sp>
         <p:nvSpPr>
-          <p:cNvPr id="5" name="Text 3"/>
-          <p:cNvSpPr/>
-          <p:nvPr/>
-        </p:nvSpPr>
-        <p:spPr>
-          <a:xfrm>
-            <a:off x="973836" y="2423160"/>
+          <p:cNvPr id="15" name="Text 13"/>
+          <p:cNvSpPr/>
+          <p:nvPr/>
+        </p:nvSpPr>
+        <p:spPr>
+          <a:xfrm>
+            <a:off x="8014716" y="2423160"/>
             <a:ext cx="3200400" cy="640080"/>
           </a:xfrm>
           <a:prstGeom prst="rect">
@@ -2466,13 +2471,13 @@
       </p:sp>
       <p:sp>
         <p:nvSpPr>
-          <p:cNvPr id="6" name="Text 4"/>
-          <p:cNvSpPr/>
-          <p:nvPr/>
-        </p:nvSpPr>
-        <p:spPr>
-          <a:xfrm>
-            <a:off x="973836" y="3017520"/>
+          <p:cNvPr id="16" name="Text 14"/>
+          <p:cNvSpPr/>
+          <p:nvPr/>
+        </p:nvSpPr>
+        <p:spPr>
+          <a:xfrm>
+            <a:off x="8014716" y="3017520"/>
             <a:ext cx="3200400" cy="274320"/>
           </a:xfrm>
           <a:prstGeom prst="rect">
@@ -2505,13 +2510,13 @@
       </p:sp>
       <p:sp>
         <p:nvSpPr>
-          <p:cNvPr id="7" name="Text 5"/>
-          <p:cNvSpPr/>
-          <p:nvPr/>
-        </p:nvSpPr>
-        <p:spPr>
-          <a:xfrm>
-            <a:off x="1293876" y="3566160"/>
+          <p:cNvPr id="17" name="Text 15"/>
+          <p:cNvSpPr/>
+          <p:nvPr/>
+        </p:nvSpPr>
+        <p:spPr>
+          <a:xfrm>
+            <a:off x="8334756" y="3566160"/>
             <a:ext cx="2560320" cy="2011680"/>
           </a:xfrm>
           <a:prstGeom prst="rect">
@@ -2524,7 +2529,7 @@
           <a:bodyPr wrap="square" rtlCol="0" anchor="t"/>
           <a:lstStyle/>
           <a:p>
-            <a:pPr algn="r" marL="342900" indent="-342900">
+            <a:pPr algn="r" marL="342900" indent="-342900" rtl="1">
               <a:buSzPct val="100000"/>
               <a:buChar char="•"/>
             </a:pPr>
@@ -2542,7 +2547,7 @@
             <a:endParaRPr lang="en-US" sz="1150" dirty="0"/>
           </a:p>
           <a:p>
-            <a:pPr algn="r" marL="342900" indent="-342900">
+            <a:pPr algn="r" marL="342900" indent="-342900" rtl="1">
               <a:buSzPct val="100000"/>
               <a:buChar char="•"/>
             </a:pPr>
@@ -2560,7 +2565,7 @@
             <a:endParaRPr lang="en-US" sz="1150" dirty="0"/>
           </a:p>
           <a:p>
-            <a:pPr algn="r" marL="342900" indent="-342900">
+            <a:pPr algn="r" marL="342900" indent="-342900" rtl="1">
               <a:buSzPct val="100000"/>
               <a:buChar char="•"/>
             </a:pPr>
@@ -2736,7 +2741,7 @@
           <a:bodyPr wrap="square" rtlCol="0" anchor="t"/>
           <a:lstStyle/>
           <a:p>
-            <a:pPr algn="r" marL="342900" indent="-342900">
+            <a:pPr algn="r" marL="342900" indent="-342900" rtl="1">
               <a:buSzPct val="100000"/>
               <a:buChar char="•"/>
             </a:pPr>
@@ -2754,7 +2759,7 @@
             <a:endParaRPr lang="en-US" sz="1150" dirty="0"/>
           </a:p>
           <a:p>
-            <a:pPr algn="r" marL="342900" indent="-342900">
+            <a:pPr algn="r" marL="342900" indent="-342900" rtl="1">
               <a:buSzPct val="100000"/>
               <a:buChar char="•"/>
             </a:pPr>
@@ -2772,7 +2777,7 @@
             <a:endParaRPr lang="en-US" sz="1150" dirty="0"/>
           </a:p>
           <a:p>
-            <a:pPr algn="r" marL="342900" indent="-342900">
+            <a:pPr algn="r" marL="342900" indent="-342900" rtl="1">
               <a:buSzPct val="100000"/>
               <a:buChar char="•"/>
             </a:pPr>
@@ -2793,13 +2798,13 @@
       </p:sp>
       <p:sp>
         <p:nvSpPr>
-          <p:cNvPr id="13" name="Shape 11"/>
-          <p:cNvSpPr/>
-          <p:nvPr/>
-        </p:nvSpPr>
-        <p:spPr>
-          <a:xfrm>
-            <a:off x="8014716" y="1737360"/>
+          <p:cNvPr id="3" name="Shape 1"/>
+          <p:cNvSpPr/>
+          <p:nvPr/>
+        </p:nvSpPr>
+        <p:spPr>
+          <a:xfrm>
+            <a:off x="973836" y="1737360"/>
             <a:ext cx="3200400" cy="4023360"/>
           </a:xfrm>
           <a:prstGeom prst="roundRect">
@@ -2815,13 +2820,13 @@
       </p:sp>
       <p:sp>
         <p:nvSpPr>
-          <p:cNvPr id="14" name="Text 12"/>
-          <p:cNvSpPr/>
-          <p:nvPr/>
-        </p:nvSpPr>
-        <p:spPr>
-          <a:xfrm>
-            <a:off x="8014716" y="2011680"/>
+          <p:cNvPr id="4" name="Text 2"/>
+          <p:cNvSpPr/>
+          <p:nvPr/>
+        </p:nvSpPr>
+        <p:spPr>
+          <a:xfrm>
+            <a:off x="973836" y="2011680"/>
             <a:ext cx="3200400" cy="365760"/>
           </a:xfrm>
           <a:prstGeom prst="rect">
@@ -2854,13 +2859,13 @@
       </p:sp>
       <p:sp>
         <p:nvSpPr>
-          <p:cNvPr id="15" name="Text 13"/>
-          <p:cNvSpPr/>
-          <p:nvPr/>
-        </p:nvSpPr>
-        <p:spPr>
-          <a:xfrm>
-            <a:off x="8014716" y="2423160"/>
+          <p:cNvPr id="5" name="Text 3"/>
+          <p:cNvSpPr/>
+          <p:nvPr/>
+        </p:nvSpPr>
+        <p:spPr>
+          <a:xfrm>
+            <a:off x="973836" y="2423160"/>
             <a:ext cx="3200400" cy="640080"/>
           </a:xfrm>
           <a:prstGeom prst="rect">
@@ -2890,13 +2895,13 @@
       </p:sp>
       <p:sp>
         <p:nvSpPr>
-          <p:cNvPr id="16" name="Text 14"/>
-          <p:cNvSpPr/>
-          <p:nvPr/>
-        </p:nvSpPr>
-        <p:spPr>
-          <a:xfrm>
-            <a:off x="8014716" y="3017520"/>
+          <p:cNvPr id="6" name="Text 4"/>
+          <p:cNvSpPr/>
+          <p:nvPr/>
+        </p:nvSpPr>
+        <p:spPr>
+          <a:xfrm>
+            <a:off x="973836" y="3017520"/>
             <a:ext cx="3200400" cy="274320"/>
           </a:xfrm>
           <a:prstGeom prst="rect">
@@ -2929,13 +2934,13 @@
       </p:sp>
       <p:sp>
         <p:nvSpPr>
-          <p:cNvPr id="17" name="Text 15"/>
-          <p:cNvSpPr/>
-          <p:nvPr/>
-        </p:nvSpPr>
-        <p:spPr>
-          <a:xfrm>
-            <a:off x="8334756" y="3566160"/>
+          <p:cNvPr id="7" name="Text 5"/>
+          <p:cNvSpPr/>
+          <p:nvPr/>
+        </p:nvSpPr>
+        <p:spPr>
+          <a:xfrm>
+            <a:off x="1293876" y="3566160"/>
             <a:ext cx="2560320" cy="2011680"/>
           </a:xfrm>
           <a:prstGeom prst="rect">
@@ -2948,7 +2953,7 @@
           <a:bodyPr wrap="square" rtlCol="0" anchor="t"/>
           <a:lstStyle/>
           <a:p>
-            <a:pPr algn="r" marL="342900" indent="-342900">
+            <a:pPr algn="r" marL="342900" indent="-342900" rtl="1">
               <a:buSzPct val="100000"/>
               <a:buChar char="•"/>
             </a:pPr>
@@ -2966,7 +2971,7 @@
             <a:endParaRPr lang="en-US" sz="1150" dirty="0"/>
           </a:p>
           <a:p>
-            <a:pPr algn="r" marL="342900" indent="-342900">
+            <a:pPr algn="r" marL="342900" indent="-342900" rtl="1">
               <a:buSzPct val="100000"/>
               <a:buChar char="•"/>
             </a:pPr>
@@ -2984,7 +2989,7 @@
             <a:endParaRPr lang="en-US" sz="1150" dirty="0"/>
           </a:p>
           <a:p>
-            <a:pPr algn="r" marL="342900" indent="-342900">
+            <a:pPr algn="r" marL="342900" indent="-342900" rtl="1">
               <a:buSzPct val="100000"/>
               <a:buChar char="•"/>
             </a:pPr>
@@ -3299,6 +3304,1205 @@
               <a:t>www.yourproduct.co.il</a:t>
             </a:r>
             <a:endParaRPr lang="en-US" sz="1300" dirty="0"/>
+          </a:p>
+        </p:txBody>
+      </p:sp>
+    </p:spTree>
+  </p:cSld>
+  <p:clrMapOvr>
+    <a:masterClrMapping/>
+  </p:clrMapOvr>
+</p:sld>
+</file>
+
+<file path=ppt/slides/slide6.xml><?xml version="1.0" encoding="utf-8"?>
+<p:sld xmlns:a="http://schemas.openxmlformats.org/drawingml/2006/main" xmlns:p="http://schemas.openxmlformats.org/presentationml/2006/main" xmlns:r="http://schemas.openxmlformats.org/officeDocument/2006/relationships">
+  <p:cSld>
+    <p:bg>
+      <p:bgPr>
+        <a:solidFill>
+          <a:srgbClr val="FFFFFF"/>
+        </a:solidFill>
+      </p:bgPr>
+    </p:bg>
+    <p:spTree>
+      <p:nvGrpSpPr>
+        <p:cNvPr id="2" name=""/>
+        <p:cNvGrpSpPr/>
+        <p:nvPr/>
+      </p:nvGrpSpPr>
+      <p:grpSpPr/>
+      <p:sp>
+        <p:nvSpPr>
+          <p:cNvPr id="3" name="Text 0"/>
+          <p:cNvSpPr/>
+          <p:nvPr/>
+        </p:nvSpPr>
+        <p:spPr>
+          <a:xfrm>
+            <a:off x="640080" y="457200"/>
+            <a:ext cx="7315200" cy="731520"/>
+          </a:xfrm>
+          <a:prstGeom prst="rect">
+            <a:avLst/>
+          </a:prstGeom>
+          <a:noFill/>
+          <a:ln/>
+        </p:spPr>
+        <p:txBody>
+          <a:bodyPr wrap="square" rtlCol="0" anchor="ctr"/>
+          <a:lstStyle/>
+          <a:p>
+            <a:pPr rtl="1" algn="r" indent="0" marL="0">
+              <a:buNone/>
+            </a:pPr>
+            <a:r>
+              <a:rPr lang="en-US" sz="3200" b="1" dirty="0">
+                <a:solidFill>
+                  <a:srgbClr val="2563EB"/>
+                </a:solidFill>
+                <a:latin typeface="Calibri" pitchFamily="34" charset="0"/>
+                <a:ea typeface="Calibri" pitchFamily="34" charset="-122"/>
+                <a:cs typeface="Calibri" pitchFamily="34" charset="-120"/>
+              </a:rPr>
+              <a:t>איך זה עובד</a:t>
+            </a:r>
+            <a:endParaRPr lang="en-US" sz="3200" dirty="0"/>
+          </a:p>
+        </p:txBody>
+      </p:sp>
+      <p:sp>
+        <p:nvSpPr>
+          <p:cNvPr id="4" name="Shape 13"/>
+          <p:cNvSpPr/>
+          <p:nvPr/>
+        </p:nvSpPr>
+        <p:spPr>
+          <a:xfrm>
+            <a:off x="8061807" y="1737360"/>
+            <a:ext cx="3291840" cy="2834640"/>
+          </a:xfrm>
+          <a:prstGeom prst="roundRect">
+            <a:avLst>
+              <a:gd name="adj" fmla="val 2807"/>
+            </a:avLst>
+          </a:prstGeom>
+          <a:solidFill>
+            <a:srgbClr val="E8EEFC"/>
+          </a:solidFill>
+          <a:ln/>
+        </p:spPr>
+      </p:sp>
+      <p:sp>
+        <p:nvSpPr>
+          <p:cNvPr id="5" name="Shape 14"/>
+          <p:cNvSpPr/>
+          <p:nvPr/>
+        </p:nvSpPr>
+        <p:spPr>
+          <a:xfrm>
+            <a:off x="9341967" y="2103120"/>
+            <a:ext cx="731520" cy="731520"/>
+          </a:xfrm>
+          <a:prstGeom prst="ellipse">
+            <a:avLst/>
+          </a:prstGeom>
+          <a:solidFill>
+            <a:srgbClr val="FFFFFF"/>
+          </a:solidFill>
+          <a:ln/>
+        </p:spPr>
+      </p:sp>
+      <p:sp>
+        <p:nvSpPr>
+          <p:cNvPr id="6" name="Text 15"/>
+          <p:cNvSpPr/>
+          <p:nvPr/>
+        </p:nvSpPr>
+        <p:spPr>
+          <a:xfrm>
+            <a:off x="9341967" y="2103120"/>
+            <a:ext cx="731520" cy="731520"/>
+          </a:xfrm>
+          <a:prstGeom prst="rect">
+            <a:avLst/>
+          </a:prstGeom>
+          <a:noFill/>
+          <a:ln/>
+        </p:spPr>
+        <p:txBody>
+          <a:bodyPr wrap="square" rtlCol="0" anchor="ctr" lIns="0" rIns="0"/>
+          <a:lstStyle/>
+          <a:p>
+            <a:pPr rtl="1" algn="ctr" indent="0" marL="0">
+              <a:buNone/>
+            </a:pPr>
+            <a:r>
+              <a:rPr lang="en-US" sz="2200" b="1" dirty="0">
+                <a:solidFill>
+                  <a:srgbClr val="2563EB"/>
+                </a:solidFill>
+                <a:latin typeface="Calibri" pitchFamily="34" charset="0"/>
+                <a:ea typeface="Calibri" pitchFamily="34" charset="-122"/>
+                <a:cs typeface="Calibri" pitchFamily="34" charset="-120"/>
+              </a:rPr>
+              <a:t>1</a:t>
+            </a:r>
+            <a:endParaRPr lang="en-US" sz="2200" dirty="0"/>
+          </a:p>
+        </p:txBody>
+      </p:sp>
+      <p:sp>
+        <p:nvSpPr>
+          <p:cNvPr id="7" name="Text 15"/>
+          <p:cNvSpPr/>
+          <p:nvPr/>
+        </p:nvSpPr>
+        <p:spPr>
+          <a:xfrm>
+            <a:off x="8198967" y="3108960"/>
+            <a:ext cx="3017520" cy="457200"/>
+          </a:xfrm>
+          <a:prstGeom prst="rect">
+            <a:avLst/>
+          </a:prstGeom>
+          <a:noFill/>
+          <a:ln/>
+        </p:spPr>
+        <p:txBody>
+          <a:bodyPr wrap="square" rtlCol="0" anchor="ctr"/>
+          <a:lstStyle/>
+          <a:p>
+            <a:pPr rtl="1" algn="ctr" indent="0" marL="0">
+              <a:buNone/>
+            </a:pPr>
+            <a:r>
+              <a:rPr lang="en-US" sz="1700" b="1" dirty="0">
+                <a:solidFill>
+                  <a:srgbClr val="1A1A1A"/>
+                </a:solidFill>
+                <a:latin typeface="Calibri" pitchFamily="34" charset="0"/>
+                <a:ea typeface="Calibri" pitchFamily="34" charset="-122"/>
+                <a:cs typeface="Calibri" pitchFamily="34" charset="-120"/>
+              </a:rPr>
+              <a:t>נרשמים בדקה</a:t>
+            </a:r>
+            <a:endParaRPr lang="en-US" sz="1700" dirty="0"/>
+          </a:p>
+        </p:txBody>
+      </p:sp>
+      <p:sp>
+        <p:nvSpPr>
+          <p:cNvPr id="8" name="Text 16"/>
+          <p:cNvSpPr/>
+          <p:nvPr/>
+        </p:nvSpPr>
+        <p:spPr>
+          <a:xfrm>
+            <a:off x="8290407" y="3611880"/>
+            <a:ext cx="2834640" cy="1463040"/>
+          </a:xfrm>
+          <a:prstGeom prst="rect">
+            <a:avLst/>
+          </a:prstGeom>
+          <a:noFill/>
+          <a:ln/>
+        </p:spPr>
+        <p:txBody>
+          <a:bodyPr wrap="square" rtlCol="0" anchor="t"/>
+          <a:lstStyle/>
+          <a:p>
+            <a:pPr rtl="1" algn="ctr" indent="0" marL="0">
+              <a:buNone/>
+            </a:pPr>
+            <a:r>
+              <a:rPr lang="en-US" sz="1300" dirty="0">
+                <a:solidFill>
+                  <a:srgbClr val="6B6B6B"/>
+                </a:solidFill>
+                <a:latin typeface="Calibri" pitchFamily="34" charset="0"/>
+                <a:ea typeface="Calibri" pitchFamily="34" charset="-122"/>
+                <a:cs typeface="Calibri" pitchFamily="34" charset="-120"/>
+              </a:rPr>
+              <a:t>פותחים חשבון בחינם, בלי כרטיס אשראי ובלי התקנה</a:t>
+            </a:r>
+            <a:endParaRPr lang="en-US" sz="1300" dirty="0"/>
+          </a:p>
+        </p:txBody>
+      </p:sp>
+      <p:sp>
+        <p:nvSpPr>
+          <p:cNvPr id="9" name="Shape 9"/>
+          <p:cNvSpPr/>
+          <p:nvPr/>
+        </p:nvSpPr>
+        <p:spPr>
+          <a:xfrm>
+            <a:off x="4449927" y="1737360"/>
+            <a:ext cx="3291840" cy="2834640"/>
+          </a:xfrm>
+          <a:prstGeom prst="roundRect">
+            <a:avLst>
+              <a:gd name="adj" fmla="val 2807"/>
+            </a:avLst>
+          </a:prstGeom>
+          <a:solidFill>
+            <a:srgbClr val="E8EEFC"/>
+          </a:solidFill>
+          <a:ln/>
+        </p:spPr>
+      </p:sp>
+      <p:sp>
+        <p:nvSpPr>
+          <p:cNvPr id="10" name="Shape 10"/>
+          <p:cNvSpPr/>
+          <p:nvPr/>
+        </p:nvSpPr>
+        <p:spPr>
+          <a:xfrm>
+            <a:off x="5730087" y="2103120"/>
+            <a:ext cx="731520" cy="731520"/>
+          </a:xfrm>
+          <a:prstGeom prst="ellipse">
+            <a:avLst/>
+          </a:prstGeom>
+          <a:solidFill>
+            <a:srgbClr val="FFFFFF"/>
+          </a:solidFill>
+          <a:ln/>
+        </p:spPr>
+      </p:sp>
+      <p:sp>
+        <p:nvSpPr>
+          <p:cNvPr id="11" name="Text 11"/>
+          <p:cNvSpPr/>
+          <p:nvPr/>
+        </p:nvSpPr>
+        <p:spPr>
+          <a:xfrm>
+            <a:off x="5730087" y="2103120"/>
+            <a:ext cx="731520" cy="731520"/>
+          </a:xfrm>
+          <a:prstGeom prst="rect">
+            <a:avLst/>
+          </a:prstGeom>
+          <a:noFill/>
+          <a:ln/>
+        </p:spPr>
+        <p:txBody>
+          <a:bodyPr wrap="square" rtlCol="0" anchor="ctr" lIns="0" rIns="0"/>
+          <a:lstStyle/>
+          <a:p>
+            <a:pPr rtl="1" algn="ctr" indent="0" marL="0">
+              <a:buNone/>
+            </a:pPr>
+            <a:r>
+              <a:rPr lang="en-US" sz="2200" b="1" dirty="0">
+                <a:solidFill>
+                  <a:srgbClr val="2563EB"/>
+                </a:solidFill>
+                <a:latin typeface="Calibri" pitchFamily="34" charset="0"/>
+                <a:ea typeface="Calibri" pitchFamily="34" charset="-122"/>
+                <a:cs typeface="Calibri" pitchFamily="34" charset="-120"/>
+              </a:rPr>
+              <a:t>2</a:t>
+            </a:r>
+            <a:endParaRPr lang="en-US" sz="2200" dirty="0"/>
+          </a:p>
+        </p:txBody>
+      </p:sp>
+      <p:sp>
+        <p:nvSpPr>
+          <p:cNvPr id="12" name="Text 11"/>
+          <p:cNvSpPr/>
+          <p:nvPr/>
+        </p:nvSpPr>
+        <p:spPr>
+          <a:xfrm>
+            <a:off x="4587087" y="3108960"/>
+            <a:ext cx="3017520" cy="457200"/>
+          </a:xfrm>
+          <a:prstGeom prst="rect">
+            <a:avLst/>
+          </a:prstGeom>
+          <a:noFill/>
+          <a:ln/>
+        </p:spPr>
+        <p:txBody>
+          <a:bodyPr wrap="square" rtlCol="0" anchor="ctr"/>
+          <a:lstStyle/>
+          <a:p>
+            <a:pPr rtl="1" algn="ctr" indent="0" marL="0">
+              <a:buNone/>
+            </a:pPr>
+            <a:r>
+              <a:rPr lang="en-US" sz="1700" b="1" dirty="0">
+                <a:solidFill>
+                  <a:srgbClr val="1A1A1A"/>
+                </a:solidFill>
+                <a:latin typeface="Calibri" pitchFamily="34" charset="0"/>
+                <a:ea typeface="Calibri" pitchFamily="34" charset="-122"/>
+                <a:cs typeface="Calibri" pitchFamily="34" charset="-120"/>
+              </a:rPr>
+              <a:t>מחברים את הנתונים</a:t>
+            </a:r>
+            <a:endParaRPr lang="en-US" sz="1700" dirty="0"/>
+          </a:p>
+        </p:txBody>
+      </p:sp>
+      <p:sp>
+        <p:nvSpPr>
+          <p:cNvPr id="13" name="Text 12"/>
+          <p:cNvSpPr/>
+          <p:nvPr/>
+        </p:nvSpPr>
+        <p:spPr>
+          <a:xfrm>
+            <a:off x="4678527" y="3611880"/>
+            <a:ext cx="2834640" cy="1463040"/>
+          </a:xfrm>
+          <a:prstGeom prst="rect">
+            <a:avLst/>
+          </a:prstGeom>
+          <a:noFill/>
+          <a:ln/>
+        </p:spPr>
+        <p:txBody>
+          <a:bodyPr wrap="square" rtlCol="0" anchor="t"/>
+          <a:lstStyle/>
+          <a:p>
+            <a:pPr rtl="1" algn="ctr" indent="0" marL="0">
+              <a:buNone/>
+            </a:pPr>
+            <a:r>
+              <a:rPr lang="en-US" sz="1300" dirty="0">
+                <a:solidFill>
+                  <a:srgbClr val="6B6B6B"/>
+                </a:solidFill>
+                <a:latin typeface="Calibri" pitchFamily="34" charset="0"/>
+                <a:ea typeface="Calibri" pitchFamily="34" charset="-122"/>
+                <a:cs typeface="Calibri" pitchFamily="34" charset="-120"/>
+              </a:rPr>
+              <a:t>מייבאים לקוחות, משימות ומסמכים בלחיצה אחת</a:t>
+            </a:r>
+            <a:endParaRPr lang="en-US" sz="1300" dirty="0"/>
+          </a:p>
+        </p:txBody>
+      </p:sp>
+      <p:sp>
+        <p:nvSpPr>
+          <p:cNvPr id="14" name="Shape 5"/>
+          <p:cNvSpPr/>
+          <p:nvPr/>
+        </p:nvSpPr>
+        <p:spPr>
+          <a:xfrm>
+            <a:off x="838047" y="1737360"/>
+            <a:ext cx="3291840" cy="2834640"/>
+          </a:xfrm>
+          <a:prstGeom prst="roundRect">
+            <a:avLst>
+              <a:gd name="adj" fmla="val 2807"/>
+            </a:avLst>
+          </a:prstGeom>
+          <a:solidFill>
+            <a:srgbClr val="E8EEFC"/>
+          </a:solidFill>
+          <a:ln/>
+        </p:spPr>
+      </p:sp>
+      <p:sp>
+        <p:nvSpPr>
+          <p:cNvPr id="15" name="Shape 6"/>
+          <p:cNvSpPr/>
+          <p:nvPr/>
+        </p:nvSpPr>
+        <p:spPr>
+          <a:xfrm>
+            <a:off x="2118207" y="2103120"/>
+            <a:ext cx="731520" cy="731520"/>
+          </a:xfrm>
+          <a:prstGeom prst="ellipse">
+            <a:avLst/>
+          </a:prstGeom>
+          <a:solidFill>
+            <a:srgbClr val="FFFFFF"/>
+          </a:solidFill>
+          <a:ln/>
+        </p:spPr>
+      </p:sp>
+      <p:sp>
+        <p:nvSpPr>
+          <p:cNvPr id="16" name="Text 7"/>
+          <p:cNvSpPr/>
+          <p:nvPr/>
+        </p:nvSpPr>
+        <p:spPr>
+          <a:xfrm>
+            <a:off x="2118207" y="2103120"/>
+            <a:ext cx="731520" cy="731520"/>
+          </a:xfrm>
+          <a:prstGeom prst="rect">
+            <a:avLst/>
+          </a:prstGeom>
+          <a:noFill/>
+          <a:ln/>
+        </p:spPr>
+        <p:txBody>
+          <a:bodyPr wrap="square" rtlCol="0" anchor="ctr" lIns="0" rIns="0"/>
+          <a:lstStyle/>
+          <a:p>
+            <a:pPr rtl="1" algn="ctr" indent="0" marL="0">
+              <a:buNone/>
+            </a:pPr>
+            <a:r>
+              <a:rPr lang="en-US" sz="2200" b="1" dirty="0">
+                <a:solidFill>
+                  <a:srgbClr val="2563EB"/>
+                </a:solidFill>
+                <a:latin typeface="Calibri" pitchFamily="34" charset="0"/>
+                <a:ea typeface="Calibri" pitchFamily="34" charset="-122"/>
+                <a:cs typeface="Calibri" pitchFamily="34" charset="-120"/>
+              </a:rPr>
+              <a:t>3</a:t>
+            </a:r>
+            <a:endParaRPr lang="en-US" sz="2200" dirty="0"/>
+          </a:p>
+        </p:txBody>
+      </p:sp>
+      <p:sp>
+        <p:nvSpPr>
+          <p:cNvPr id="17" name="Text 7"/>
+          <p:cNvSpPr/>
+          <p:nvPr/>
+        </p:nvSpPr>
+        <p:spPr>
+          <a:xfrm>
+            <a:off x="975207" y="3108960"/>
+            <a:ext cx="3017520" cy="457200"/>
+          </a:xfrm>
+          <a:prstGeom prst="rect">
+            <a:avLst/>
+          </a:prstGeom>
+          <a:noFill/>
+          <a:ln/>
+        </p:spPr>
+        <p:txBody>
+          <a:bodyPr wrap="square" rtlCol="0" anchor="ctr"/>
+          <a:lstStyle/>
+          <a:p>
+            <a:pPr rtl="1" algn="ctr" indent="0" marL="0">
+              <a:buNone/>
+            </a:pPr>
+            <a:r>
+              <a:rPr lang="en-US" sz="1700" b="1" dirty="0">
+                <a:solidFill>
+                  <a:srgbClr val="1A1A1A"/>
+                </a:solidFill>
+                <a:latin typeface="Calibri" pitchFamily="34" charset="0"/>
+                <a:ea typeface="Calibri" pitchFamily="34" charset="-122"/>
+                <a:cs typeface="Calibri" pitchFamily="34" charset="-120"/>
+              </a:rPr>
+              <a:t>מתחילים לחסוך זמן</a:t>
+            </a:r>
+            <a:endParaRPr lang="en-US" sz="1700" dirty="0"/>
+          </a:p>
+        </p:txBody>
+      </p:sp>
+      <p:sp>
+        <p:nvSpPr>
+          <p:cNvPr id="18" name="Text 8"/>
+          <p:cNvSpPr/>
+          <p:nvPr/>
+        </p:nvSpPr>
+        <p:spPr>
+          <a:xfrm>
+            <a:off x="1066647" y="3611880"/>
+            <a:ext cx="2834640" cy="1463040"/>
+          </a:xfrm>
+          <a:prstGeom prst="rect">
+            <a:avLst/>
+          </a:prstGeom>
+          <a:noFill/>
+          <a:ln/>
+        </p:spPr>
+        <p:txBody>
+          <a:bodyPr wrap="square" rtlCol="0" anchor="t"/>
+          <a:lstStyle/>
+          <a:p>
+            <a:pPr rtl="1" algn="ctr" indent="0" marL="0">
+              <a:buNone/>
+            </a:pPr>
+            <a:r>
+              <a:rPr lang="en-US" sz="1300" dirty="0">
+                <a:solidFill>
+                  <a:srgbClr val="6B6B6B"/>
+                </a:solidFill>
+                <a:latin typeface="Calibri" pitchFamily="34" charset="0"/>
+                <a:ea typeface="Calibri" pitchFamily="34" charset="-122"/>
+                <a:cs typeface="Calibri" pitchFamily="34" charset="-120"/>
+              </a:rPr>
+              <a:t>המערכת מטפלת בעבודה השוטפת, ואתם מתפנים לעסק</a:t>
+            </a:r>
+            <a:endParaRPr lang="en-US" sz="1300" dirty="0"/>
+          </a:p>
+        </p:txBody>
+      </p:sp>
+    </p:spTree>
+  </p:cSld>
+  <p:clrMapOvr>
+    <a:masterClrMapping/>
+  </p:clrMapOvr>
+</p:sld>
+</file>
+
+<file path=ppt/slides/slide7.xml><?xml version="1.0" encoding="utf-8"?>
+<p:sld xmlns:a="http://schemas.openxmlformats.org/drawingml/2006/main" xmlns:p="http://schemas.openxmlformats.org/presentationml/2006/main" xmlns:r="http://schemas.openxmlformats.org/officeDocument/2006/relationships">
+  <p:cSld>
+    <p:bg>
+      <p:bgPr>
+        <a:solidFill>
+          <a:srgbClr val="FFFFFF"/>
+        </a:solidFill>
+      </p:bgPr>
+    </p:bg>
+    <p:spTree>
+      <p:nvGrpSpPr>
+        <p:cNvPr id="2" name=""/>
+        <p:cNvGrpSpPr/>
+        <p:nvPr/>
+      </p:nvGrpSpPr>
+      <p:grpSpPr/>
+      <p:sp>
+        <p:nvSpPr>
+          <p:cNvPr id="3" name="Text 0"/>
+          <p:cNvSpPr/>
+          <p:nvPr/>
+        </p:nvSpPr>
+        <p:spPr>
+          <a:xfrm>
+            <a:off x="640080" y="457200"/>
+            <a:ext cx="7315200" cy="731520"/>
+          </a:xfrm>
+          <a:prstGeom prst="rect">
+            <a:avLst/>
+          </a:prstGeom>
+          <a:noFill/>
+          <a:ln/>
+        </p:spPr>
+        <p:txBody>
+          <a:bodyPr wrap="square" rtlCol="0" anchor="ctr"/>
+          <a:lstStyle/>
+          <a:p>
+            <a:pPr rtl="1" algn="r" indent="0" marL="0">
+              <a:buNone/>
+            </a:pPr>
+            <a:r>
+              <a:rPr lang="en-US" sz="3200" b="1" dirty="0">
+                <a:solidFill>
+                  <a:srgbClr val="2563EB"/>
+                </a:solidFill>
+                <a:latin typeface="Calibri" pitchFamily="34" charset="0"/>
+                <a:ea typeface="Calibri" pitchFamily="34" charset="-122"/>
+                <a:cs typeface="Calibri" pitchFamily="34" charset="-120"/>
+              </a:rPr>
+              <a:t>מה הלקוחות אומרים</a:t>
+            </a:r>
+            <a:endParaRPr lang="en-US" sz="3200" dirty="0"/>
+          </a:p>
+        </p:txBody>
+      </p:sp>
+      <p:sp>
+        <p:nvSpPr>
+          <p:cNvPr id="4" name="Shape 13"/>
+          <p:cNvSpPr/>
+          <p:nvPr/>
+        </p:nvSpPr>
+        <p:spPr>
+          <a:xfrm>
+            <a:off x="8061807" y="1737360"/>
+            <a:ext cx="3291840" cy="3337560"/>
+          </a:xfrm>
+          <a:prstGeom prst="roundRect">
+            <a:avLst>
+              <a:gd name="adj" fmla="val 2807"/>
+            </a:avLst>
+          </a:prstGeom>
+          <a:solidFill>
+            <a:srgbClr val="E8EEFC"/>
+          </a:solidFill>
+          <a:ln/>
+        </p:spPr>
+      </p:sp>
+      <p:sp>
+        <p:nvSpPr>
+          <p:cNvPr id="5" name="Shape 14"/>
+          <p:cNvSpPr/>
+          <p:nvPr/>
+        </p:nvSpPr>
+        <p:spPr>
+          <a:xfrm>
+            <a:off x="9341967" y="2103120"/>
+            <a:ext cx="731520" cy="731520"/>
+          </a:xfrm>
+          <a:prstGeom prst="ellipse">
+            <a:avLst/>
+          </a:prstGeom>
+          <a:solidFill>
+            <a:srgbClr val="FFFFFF"/>
+          </a:solidFill>
+          <a:ln/>
+        </p:spPr>
+      </p:sp>
+      <p:sp>
+        <p:nvSpPr>
+          <p:cNvPr id="6" name="Text 15"/>
+          <p:cNvSpPr/>
+          <p:nvPr/>
+        </p:nvSpPr>
+        <p:spPr>
+          <a:xfrm>
+            <a:off x="9341967" y="2103120"/>
+            <a:ext cx="731520" cy="731520"/>
+          </a:xfrm>
+          <a:prstGeom prst="rect">
+            <a:avLst/>
+          </a:prstGeom>
+          <a:noFill/>
+          <a:ln/>
+        </p:spPr>
+        <p:txBody>
+          <a:bodyPr wrap="square" rtlCol="0" anchor="ctr" lIns="0" rIns="0"/>
+          <a:lstStyle/>
+          <a:p>
+            <a:pPr rtl="1" algn="ctr" indent="0" marL="0">
+              <a:buNone/>
+            </a:pPr>
+            <a:r>
+              <a:rPr lang="en-US" sz="3000" b="1" dirty="0">
+                <a:solidFill>
+                  <a:srgbClr val="2563EB"/>
+                </a:solidFill>
+                <a:latin typeface="Calibri" pitchFamily="34" charset="0"/>
+                <a:ea typeface="Calibri" pitchFamily="34" charset="-122"/>
+                <a:cs typeface="Calibri" pitchFamily="34" charset="-120"/>
+              </a:rPr>
+              <a:t>”</a:t>
+            </a:r>
+            <a:endParaRPr lang="en-US" sz="3000" dirty="0"/>
+          </a:p>
+        </p:txBody>
+      </p:sp>
+      <p:sp>
+        <p:nvSpPr>
+          <p:cNvPr id="7" name="Text 16"/>
+          <p:cNvSpPr/>
+          <p:nvPr/>
+        </p:nvSpPr>
+        <p:spPr>
+          <a:xfrm>
+            <a:off x="8290407" y="2971800"/>
+            <a:ext cx="2834640" cy="1280160"/>
+          </a:xfrm>
+          <a:prstGeom prst="rect">
+            <a:avLst/>
+          </a:prstGeom>
+          <a:noFill/>
+          <a:ln/>
+        </p:spPr>
+        <p:txBody>
+          <a:bodyPr wrap="square" rtlCol="0" anchor="t"/>
+          <a:lstStyle/>
+          <a:p>
+            <a:pPr rtl="1" algn="ctr" indent="0" marL="0">
+              <a:buNone/>
+            </a:pPr>
+            <a:r>
+              <a:rPr lang="en-US" sz="1450" dirty="0" i="1">
+                <a:solidFill>
+                  <a:srgbClr val="1A1A1A"/>
+                </a:solidFill>
+                <a:latin typeface="Calibri" pitchFamily="34" charset="0"/>
+                <a:ea typeface="Calibri" pitchFamily="34" charset="-122"/>
+                <a:cs typeface="Calibri" pitchFamily="34" charset="-120"/>
+              </a:rPr>
+              <a:t>"חסכנו שעות עבודה כבר מהשבוע הראשון. היום אנחנו לא מבינים איך הסתדרנו בלי זה."</a:t>
+            </a:r>
+            <a:endParaRPr lang="en-US" sz="1450" dirty="0"/>
+          </a:p>
+        </p:txBody>
+      </p:sp>
+      <p:sp>
+        <p:nvSpPr>
+          <p:cNvPr id="8" name="Text 15"/>
+          <p:cNvSpPr/>
+          <p:nvPr/>
+        </p:nvSpPr>
+        <p:spPr>
+          <a:xfrm>
+            <a:off x="8198967" y="4206240"/>
+            <a:ext cx="3017520" cy="365760"/>
+          </a:xfrm>
+          <a:prstGeom prst="rect">
+            <a:avLst/>
+          </a:prstGeom>
+          <a:noFill/>
+          <a:ln/>
+        </p:spPr>
+        <p:txBody>
+          <a:bodyPr wrap="square" rtlCol="0" anchor="ctr"/>
+          <a:lstStyle/>
+          <a:p>
+            <a:pPr rtl="1" algn="ctr" indent="0" marL="0">
+              <a:buNone/>
+            </a:pPr>
+            <a:r>
+              <a:rPr lang="en-US" sz="1400" b="1" dirty="0">
+                <a:solidFill>
+                  <a:srgbClr val="1A1A1A"/>
+                </a:solidFill>
+                <a:latin typeface="Calibri" pitchFamily="34" charset="0"/>
+                <a:ea typeface="Calibri" pitchFamily="34" charset="-122"/>
+                <a:cs typeface="Calibri" pitchFamily="34" charset="-120"/>
+              </a:rPr>
+              <a:t>שם מלא</a:t>
+            </a:r>
+            <a:endParaRPr lang="en-US" sz="1400" dirty="0"/>
+          </a:p>
+        </p:txBody>
+      </p:sp>
+      <p:sp>
+        <p:nvSpPr>
+          <p:cNvPr id="9" name="Text 15"/>
+          <p:cNvSpPr/>
+          <p:nvPr/>
+        </p:nvSpPr>
+        <p:spPr>
+          <a:xfrm>
+            <a:off x="8198967" y="4553712"/>
+            <a:ext cx="3017520" cy="365760"/>
+          </a:xfrm>
+          <a:prstGeom prst="rect">
+            <a:avLst/>
+          </a:prstGeom>
+          <a:noFill/>
+          <a:ln/>
+        </p:spPr>
+        <p:txBody>
+          <a:bodyPr wrap="square" rtlCol="0" anchor="ctr"/>
+          <a:lstStyle/>
+          <a:p>
+            <a:pPr rtl="1" algn="ctr" indent="0" marL="0">
+              <a:buNone/>
+            </a:pPr>
+            <a:r>
+              <a:rPr lang="en-US" sz="1150" b="0" dirty="0">
+                <a:solidFill>
+                  <a:srgbClr val="2563EB"/>
+                </a:solidFill>
+                <a:latin typeface="Calibri" pitchFamily="34" charset="0"/>
+                <a:ea typeface="Calibri" pitchFamily="34" charset="-122"/>
+                <a:cs typeface="Calibri" pitchFamily="34" charset="-120"/>
+              </a:rPr>
+              <a:t>בעלים, שם העסק</a:t>
+            </a:r>
+            <a:endParaRPr lang="en-US" sz="1150" dirty="0"/>
+          </a:p>
+        </p:txBody>
+      </p:sp>
+      <p:sp>
+        <p:nvSpPr>
+          <p:cNvPr id="10" name="Shape 9"/>
+          <p:cNvSpPr/>
+          <p:nvPr/>
+        </p:nvSpPr>
+        <p:spPr>
+          <a:xfrm>
+            <a:off x="4449927" y="1737360"/>
+            <a:ext cx="3291840" cy="3337560"/>
+          </a:xfrm>
+          <a:prstGeom prst="roundRect">
+            <a:avLst>
+              <a:gd name="adj" fmla="val 2807"/>
+            </a:avLst>
+          </a:prstGeom>
+          <a:solidFill>
+            <a:srgbClr val="E8EEFC"/>
+          </a:solidFill>
+          <a:ln/>
+        </p:spPr>
+      </p:sp>
+      <p:sp>
+        <p:nvSpPr>
+          <p:cNvPr id="11" name="Shape 10"/>
+          <p:cNvSpPr/>
+          <p:nvPr/>
+        </p:nvSpPr>
+        <p:spPr>
+          <a:xfrm>
+            <a:off x="5730087" y="2103120"/>
+            <a:ext cx="731520" cy="731520"/>
+          </a:xfrm>
+          <a:prstGeom prst="ellipse">
+            <a:avLst/>
+          </a:prstGeom>
+          <a:solidFill>
+            <a:srgbClr val="FFFFFF"/>
+          </a:solidFill>
+          <a:ln/>
+        </p:spPr>
+      </p:sp>
+      <p:sp>
+        <p:nvSpPr>
+          <p:cNvPr id="12" name="Text 11"/>
+          <p:cNvSpPr/>
+          <p:nvPr/>
+        </p:nvSpPr>
+        <p:spPr>
+          <a:xfrm>
+            <a:off x="5730087" y="2103120"/>
+            <a:ext cx="731520" cy="731520"/>
+          </a:xfrm>
+          <a:prstGeom prst="rect">
+            <a:avLst/>
+          </a:prstGeom>
+          <a:noFill/>
+          <a:ln/>
+        </p:spPr>
+        <p:txBody>
+          <a:bodyPr wrap="square" rtlCol="0" anchor="ctr" lIns="0" rIns="0"/>
+          <a:lstStyle/>
+          <a:p>
+            <a:pPr rtl="1" algn="ctr" indent="0" marL="0">
+              <a:buNone/>
+            </a:pPr>
+            <a:r>
+              <a:rPr lang="en-US" sz="3000" b="1" dirty="0">
+                <a:solidFill>
+                  <a:srgbClr val="2563EB"/>
+                </a:solidFill>
+                <a:latin typeface="Calibri" pitchFamily="34" charset="0"/>
+                <a:ea typeface="Calibri" pitchFamily="34" charset="-122"/>
+                <a:cs typeface="Calibri" pitchFamily="34" charset="-120"/>
+              </a:rPr>
+              <a:t>”</a:t>
+            </a:r>
+            <a:endParaRPr lang="en-US" sz="3000" dirty="0"/>
+          </a:p>
+        </p:txBody>
+      </p:sp>
+      <p:sp>
+        <p:nvSpPr>
+          <p:cNvPr id="13" name="Text 12"/>
+          <p:cNvSpPr/>
+          <p:nvPr/>
+        </p:nvSpPr>
+        <p:spPr>
+          <a:xfrm>
+            <a:off x="4678527" y="2971800"/>
+            <a:ext cx="2834640" cy="1280160"/>
+          </a:xfrm>
+          <a:prstGeom prst="rect">
+            <a:avLst/>
+          </a:prstGeom>
+          <a:noFill/>
+          <a:ln/>
+        </p:spPr>
+        <p:txBody>
+          <a:bodyPr wrap="square" rtlCol="0" anchor="t"/>
+          <a:lstStyle/>
+          <a:p>
+            <a:pPr rtl="1" algn="ctr" indent="0" marL="0">
+              <a:buNone/>
+            </a:pPr>
+            <a:r>
+              <a:rPr lang="en-US" sz="1450" dirty="0" i="1">
+                <a:solidFill>
+                  <a:srgbClr val="1A1A1A"/>
+                </a:solidFill>
+                <a:latin typeface="Calibri" pitchFamily="34" charset="0"/>
+                <a:ea typeface="Calibri" pitchFamily="34" charset="-122"/>
+                <a:cs typeface="Calibri" pitchFamily="34" charset="-120"/>
+              </a:rPr>
+              <a:t>"ההטמעה הייתה פשוטה, והתמיכה עונה מהר ובאמת עוזרת. ממליצים בחום."</a:t>
+            </a:r>
+            <a:endParaRPr lang="en-US" sz="1450" dirty="0"/>
+          </a:p>
+        </p:txBody>
+      </p:sp>
+      <p:sp>
+        <p:nvSpPr>
+          <p:cNvPr id="14" name="Text 11"/>
+          <p:cNvSpPr/>
+          <p:nvPr/>
+        </p:nvSpPr>
+        <p:spPr>
+          <a:xfrm>
+            <a:off x="4587087" y="4206240"/>
+            <a:ext cx="3017520" cy="365760"/>
+          </a:xfrm>
+          <a:prstGeom prst="rect">
+            <a:avLst/>
+          </a:prstGeom>
+          <a:noFill/>
+          <a:ln/>
+        </p:spPr>
+        <p:txBody>
+          <a:bodyPr wrap="square" rtlCol="0" anchor="ctr"/>
+          <a:lstStyle/>
+          <a:p>
+            <a:pPr rtl="1" algn="ctr" indent="0" marL="0">
+              <a:buNone/>
+            </a:pPr>
+            <a:r>
+              <a:rPr lang="en-US" sz="1400" b="1" dirty="0">
+                <a:solidFill>
+                  <a:srgbClr val="1A1A1A"/>
+                </a:solidFill>
+                <a:latin typeface="Calibri" pitchFamily="34" charset="0"/>
+                <a:ea typeface="Calibri" pitchFamily="34" charset="-122"/>
+                <a:cs typeface="Calibri" pitchFamily="34" charset="-120"/>
+              </a:rPr>
+              <a:t>שם מלא</a:t>
+            </a:r>
+            <a:endParaRPr lang="en-US" sz="1400" dirty="0"/>
+          </a:p>
+        </p:txBody>
+      </p:sp>
+      <p:sp>
+        <p:nvSpPr>
+          <p:cNvPr id="15" name="Text 11"/>
+          <p:cNvSpPr/>
+          <p:nvPr/>
+        </p:nvSpPr>
+        <p:spPr>
+          <a:xfrm>
+            <a:off x="4587087" y="4553712"/>
+            <a:ext cx="3017520" cy="365760"/>
+          </a:xfrm>
+          <a:prstGeom prst="rect">
+            <a:avLst/>
+          </a:prstGeom>
+          <a:noFill/>
+          <a:ln/>
+        </p:spPr>
+        <p:txBody>
+          <a:bodyPr wrap="square" rtlCol="0" anchor="ctr"/>
+          <a:lstStyle/>
+          <a:p>
+            <a:pPr rtl="1" algn="ctr" indent="0" marL="0">
+              <a:buNone/>
+            </a:pPr>
+            <a:r>
+              <a:rPr lang="en-US" sz="1150" b="0" dirty="0">
+                <a:solidFill>
+                  <a:srgbClr val="2563EB"/>
+                </a:solidFill>
+                <a:latin typeface="Calibri" pitchFamily="34" charset="0"/>
+                <a:ea typeface="Calibri" pitchFamily="34" charset="-122"/>
+                <a:cs typeface="Calibri" pitchFamily="34" charset="-120"/>
+              </a:rPr>
+              <a:t>מנהלת תפעול, שם החברה</a:t>
+            </a:r>
+            <a:endParaRPr lang="en-US" sz="1150" dirty="0"/>
+          </a:p>
+        </p:txBody>
+      </p:sp>
+      <p:sp>
+        <p:nvSpPr>
+          <p:cNvPr id="16" name="Shape 5"/>
+          <p:cNvSpPr/>
+          <p:nvPr/>
+        </p:nvSpPr>
+        <p:spPr>
+          <a:xfrm>
+            <a:off x="838047" y="1737360"/>
+            <a:ext cx="3291840" cy="3337560"/>
+          </a:xfrm>
+          <a:prstGeom prst="roundRect">
+            <a:avLst>
+              <a:gd name="adj" fmla="val 2807"/>
+            </a:avLst>
+          </a:prstGeom>
+          <a:solidFill>
+            <a:srgbClr val="E8EEFC"/>
+          </a:solidFill>
+          <a:ln/>
+        </p:spPr>
+      </p:sp>
+      <p:sp>
+        <p:nvSpPr>
+          <p:cNvPr id="17" name="Shape 6"/>
+          <p:cNvSpPr/>
+          <p:nvPr/>
+        </p:nvSpPr>
+        <p:spPr>
+          <a:xfrm>
+            <a:off x="2118207" y="2103120"/>
+            <a:ext cx="731520" cy="731520"/>
+          </a:xfrm>
+          <a:prstGeom prst="ellipse">
+            <a:avLst/>
+          </a:prstGeom>
+          <a:solidFill>
+            <a:srgbClr val="FFFFFF"/>
+          </a:solidFill>
+          <a:ln/>
+        </p:spPr>
+      </p:sp>
+      <p:sp>
+        <p:nvSpPr>
+          <p:cNvPr id="18" name="Text 7"/>
+          <p:cNvSpPr/>
+          <p:nvPr/>
+        </p:nvSpPr>
+        <p:spPr>
+          <a:xfrm>
+            <a:off x="2118207" y="2103120"/>
+            <a:ext cx="731520" cy="731520"/>
+          </a:xfrm>
+          <a:prstGeom prst="rect">
+            <a:avLst/>
+          </a:prstGeom>
+          <a:noFill/>
+          <a:ln/>
+        </p:spPr>
+        <p:txBody>
+          <a:bodyPr wrap="square" rtlCol="0" anchor="ctr" lIns="0" rIns="0"/>
+          <a:lstStyle/>
+          <a:p>
+            <a:pPr rtl="1" algn="ctr" indent="0" marL="0">
+              <a:buNone/>
+            </a:pPr>
+            <a:r>
+              <a:rPr lang="en-US" sz="3000" b="1" dirty="0">
+                <a:solidFill>
+                  <a:srgbClr val="2563EB"/>
+                </a:solidFill>
+                <a:latin typeface="Calibri" pitchFamily="34" charset="0"/>
+                <a:ea typeface="Calibri" pitchFamily="34" charset="-122"/>
+                <a:cs typeface="Calibri" pitchFamily="34" charset="-120"/>
+              </a:rPr>
+              <a:t>”</a:t>
+            </a:r>
+            <a:endParaRPr lang="en-US" sz="3000" dirty="0"/>
+          </a:p>
+        </p:txBody>
+      </p:sp>
+      <p:sp>
+        <p:nvSpPr>
+          <p:cNvPr id="19" name="Text 8"/>
+          <p:cNvSpPr/>
+          <p:nvPr/>
+        </p:nvSpPr>
+        <p:spPr>
+          <a:xfrm>
+            <a:off x="1066647" y="2971800"/>
+            <a:ext cx="2834640" cy="1280160"/>
+          </a:xfrm>
+          <a:prstGeom prst="rect">
+            <a:avLst/>
+          </a:prstGeom>
+          <a:noFill/>
+          <a:ln/>
+        </p:spPr>
+        <p:txBody>
+          <a:bodyPr wrap="square" rtlCol="0" anchor="t"/>
+          <a:lstStyle/>
+          <a:p>
+            <a:pPr rtl="1" algn="ctr" indent="0" marL="0">
+              <a:buNone/>
+            </a:pPr>
+            <a:r>
+              <a:rPr lang="en-US" sz="1450" dirty="0" i="1">
+                <a:solidFill>
+                  <a:srgbClr val="1A1A1A"/>
+                </a:solidFill>
+                <a:latin typeface="Calibri" pitchFamily="34" charset="0"/>
+                <a:ea typeface="Calibri" pitchFamily="34" charset="-122"/>
+                <a:cs typeface="Calibri" pitchFamily="34" charset="-120"/>
+              </a:rPr>
+              <a:t>"סוף סוף כל הנתונים במקום אחד, ואנחנו מקבלים החלטות מהר יותר."</a:t>
+            </a:r>
+            <a:endParaRPr lang="en-US" sz="1450" dirty="0"/>
+          </a:p>
+        </p:txBody>
+      </p:sp>
+      <p:sp>
+        <p:nvSpPr>
+          <p:cNvPr id="20" name="Text 7"/>
+          <p:cNvSpPr/>
+          <p:nvPr/>
+        </p:nvSpPr>
+        <p:spPr>
+          <a:xfrm>
+            <a:off x="975207" y="4206240"/>
+            <a:ext cx="3017520" cy="365760"/>
+          </a:xfrm>
+          <a:prstGeom prst="rect">
+            <a:avLst/>
+          </a:prstGeom>
+          <a:noFill/>
+          <a:ln/>
+        </p:spPr>
+        <p:txBody>
+          <a:bodyPr wrap="square" rtlCol="0" anchor="ctr"/>
+          <a:lstStyle/>
+          <a:p>
+            <a:pPr rtl="1" algn="ctr" indent="0" marL="0">
+              <a:buNone/>
+            </a:pPr>
+            <a:r>
+              <a:rPr lang="en-US" sz="1400" b="1" dirty="0">
+                <a:solidFill>
+                  <a:srgbClr val="1A1A1A"/>
+                </a:solidFill>
+                <a:latin typeface="Calibri" pitchFamily="34" charset="0"/>
+                <a:ea typeface="Calibri" pitchFamily="34" charset="-122"/>
+                <a:cs typeface="Calibri" pitchFamily="34" charset="-120"/>
+              </a:rPr>
+              <a:t>שם מלא</a:t>
+            </a:r>
+            <a:endParaRPr lang="en-US" sz="1400" dirty="0"/>
+          </a:p>
+        </p:txBody>
+      </p:sp>
+      <p:sp>
+        <p:nvSpPr>
+          <p:cNvPr id="21" name="Text 7"/>
+          <p:cNvSpPr/>
+          <p:nvPr/>
+        </p:nvSpPr>
+        <p:spPr>
+          <a:xfrm>
+            <a:off x="975207" y="4553712"/>
+            <a:ext cx="3017520" cy="365760"/>
+          </a:xfrm>
+          <a:prstGeom prst="rect">
+            <a:avLst/>
+          </a:prstGeom>
+          <a:noFill/>
+          <a:ln/>
+        </p:spPr>
+        <p:txBody>
+          <a:bodyPr wrap="square" rtlCol="0" anchor="ctr"/>
+          <a:lstStyle/>
+          <a:p>
+            <a:pPr rtl="1" algn="ctr" indent="0" marL="0">
+              <a:buNone/>
+            </a:pPr>
+            <a:r>
+              <a:rPr lang="en-US" sz="1150" b="0" dirty="0">
+                <a:solidFill>
+                  <a:srgbClr val="2563EB"/>
+                </a:solidFill>
+                <a:latin typeface="Calibri" pitchFamily="34" charset="0"/>
+                <a:ea typeface="Calibri" pitchFamily="34" charset="-122"/>
+                <a:cs typeface="Calibri" pitchFamily="34" charset="-120"/>
+              </a:rPr>
+              <a:t>מייסד, שם הסטודיו</a:t>
+            </a:r>
+            <a:endParaRPr lang="en-US" sz="1150" dirty="0"/>
           </a:p>
         </p:txBody>
       </p:sp>
